--- a/docs/presentaciones/classes/clase-135-rnns-neuronas-recurrentes-bptt-presentacion.pptx
+++ b/docs/presentaciones/classes/clase-135-rnns-neuronas-recurrentes-bptt-presentacion.pptx
@@ -4888,7 +4888,387 @@
                 </a:solidFill>
                 <a:latin typeface="Courier New"/>
               </a:rPr>
-              <a:t># Imports y configuración inicial</a:t>
+              <a:t>import numpy as np</a:t>
+            </a:r>
+          </a:p>
+          <a:p>
+            <a:pPr>
+              <a:defRPr sz="1200" b="0">
+                <a:solidFill>
+                  <a:srgbClr val="F8FAFC"/>
+                </a:solidFill>
+                <a:latin typeface="Courier New"/>
+              </a:defRPr>
+            </a:pPr>
+            <a:r>
+              <a:rPr sz="1200" b="0">
+                <a:solidFill>
+                  <a:srgbClr val="F8FAFC"/>
+                </a:solidFill>
+                <a:latin typeface="Courier New"/>
+              </a:rPr>
+              <a:t>from tensorflow import keras</a:t>
+            </a:r>
+          </a:p>
+          <a:p>
+            <a:pPr>
+              <a:defRPr sz="1200" b="0">
+                <a:solidFill>
+                  <a:srgbClr val="F8FAFC"/>
+                </a:solidFill>
+                <a:latin typeface="Courier New"/>
+              </a:defRPr>
+            </a:pPr>
+            <a:r>
+              <a:rPr sz="1200" b="0">
+                <a:solidFill>
+                  <a:srgbClr val="F8FAFC"/>
+                </a:solidFill>
+                <a:latin typeface="Courier New"/>
+              </a:rPr>
+              <a:t>from tensorflow.keras import layers</a:t>
+            </a:r>
+          </a:p>
+          <a:p>
+            <a:pPr>
+              <a:defRPr sz="1200" b="0">
+                <a:solidFill>
+                  <a:srgbClr val="F8FAFC"/>
+                </a:solidFill>
+                <a:latin typeface="Courier New"/>
+              </a:defRPr>
+            </a:pPr>
+            <a:r>
+              <a:rPr sz="1200" b="0">
+                <a:solidFill>
+                  <a:srgbClr val="F8FAFC"/>
+                </a:solidFill>
+                <a:latin typeface="Courier New"/>
+              </a:rPr>
+              <a:t>keras.utils.set_random_seed(42)</a:t>
+            </a:r>
+          </a:p>
+          <a:p>
+            <a:pPr>
+              <a:defRPr sz="1200" b="0">
+                <a:solidFill>
+                  <a:srgbClr val="F8FAFC"/>
+                </a:solidFill>
+                <a:latin typeface="Courier New"/>
+              </a:defRPr>
+            </a:pPr>
+            <a:r>
+              <a:rPr sz="1200" b="0">
+                <a:solidFill>
+                  <a:srgbClr val="F8FAFC"/>
+                </a:solidFill>
+                <a:latin typeface="Courier New"/>
+              </a:rPr>
+              <a:t>rng = np.random.default_rng(42)</a:t>
+            </a:r>
+          </a:p>
+          <a:p>
+            <a:pPr>
+              <a:defRPr sz="1200" b="0">
+                <a:solidFill>
+                  <a:srgbClr val="F8FAFC"/>
+                </a:solidFill>
+                <a:latin typeface="Courier New"/>
+              </a:defRPr>
+            </a:pPr>
+            <a:r>
+              <a:rPr sz="1200" b="0">
+                <a:solidFill>
+                  <a:srgbClr val="F8FAFC"/>
+                </a:solidFill>
+                <a:latin typeface="Courier New"/>
+              </a:rPr>
+              <a:t> </a:t>
+            </a:r>
+          </a:p>
+          <a:p>
+            <a:pPr>
+              <a:defRPr sz="1200" b="0">
+                <a:solidFill>
+                  <a:srgbClr val="F8FAFC"/>
+                </a:solidFill>
+                <a:latin typeface="Courier New"/>
+              </a:defRPr>
+            </a:pPr>
+            <a:r>
+              <a:rPr sz="1200" b="0">
+                <a:solidFill>
+                  <a:srgbClr val="F8FAFC"/>
+                </a:solidFill>
+                <a:latin typeface="Courier New"/>
+              </a:rPr>
+              <a:t># h_t = tanh(W_x·x_t + W_h·h_{t-1} + b) — misma celda en cada paso</a:t>
+            </a:r>
+          </a:p>
+          <a:p>
+            <a:pPr>
+              <a:defRPr sz="1200" b="0">
+                <a:solidFill>
+                  <a:srgbClr val="F8FAFC"/>
+                </a:solidFill>
+                <a:latin typeface="Courier New"/>
+              </a:defRPr>
+            </a:pPr>
+            <a:r>
+              <a:rPr sz="1200" b="0">
+                <a:solidFill>
+                  <a:srgbClr val="F8FAFC"/>
+                </a:solidFill>
+                <a:latin typeface="Courier New"/>
+              </a:rPr>
+              <a:t>T, n_x, n_h = 5, 3, 4</a:t>
+            </a:r>
+          </a:p>
+          <a:p>
+            <a:pPr>
+              <a:defRPr sz="1200" b="0">
+                <a:solidFill>
+                  <a:srgbClr val="F8FAFC"/>
+                </a:solidFill>
+                <a:latin typeface="Courier New"/>
+              </a:defRPr>
+            </a:pPr>
+            <a:r>
+              <a:rPr sz="1200" b="0">
+                <a:solidFill>
+                  <a:srgbClr val="F8FAFC"/>
+                </a:solidFill>
+                <a:latin typeface="Courier New"/>
+              </a:rPr>
+              <a:t>Wx = rng.standard_normal((n_h, n_x)) * 0.1</a:t>
+            </a:r>
+          </a:p>
+          <a:p>
+            <a:pPr>
+              <a:defRPr sz="1200" b="0">
+                <a:solidFill>
+                  <a:srgbClr val="F8FAFC"/>
+                </a:solidFill>
+                <a:latin typeface="Courier New"/>
+              </a:defRPr>
+            </a:pPr>
+            <a:r>
+              <a:rPr sz="1200" b="0">
+                <a:solidFill>
+                  <a:srgbClr val="F8FAFC"/>
+                </a:solidFill>
+                <a:latin typeface="Courier New"/>
+              </a:rPr>
+              <a:t>Wh = rng.standard_normal((n_h, n_h)) * 0.1</a:t>
+            </a:r>
+          </a:p>
+          <a:p>
+            <a:pPr>
+              <a:defRPr sz="1200" b="0">
+                <a:solidFill>
+                  <a:srgbClr val="F8FAFC"/>
+                </a:solidFill>
+                <a:latin typeface="Courier New"/>
+              </a:defRPr>
+            </a:pPr>
+            <a:r>
+              <a:rPr sz="1200" b="0">
+                <a:solidFill>
+                  <a:srgbClr val="F8FAFC"/>
+                </a:solidFill>
+                <a:latin typeface="Courier New"/>
+              </a:rPr>
+              <a:t>b = np.zeros(n_h)</a:t>
+            </a:r>
+          </a:p>
+          <a:p>
+            <a:pPr>
+              <a:defRPr sz="1200" b="0">
+                <a:solidFill>
+                  <a:srgbClr val="F8FAFC"/>
+                </a:solidFill>
+                <a:latin typeface="Courier New"/>
+              </a:defRPr>
+            </a:pPr>
+            <a:r>
+              <a:rPr sz="1200" b="0">
+                <a:solidFill>
+                  <a:srgbClr val="F8FAFC"/>
+                </a:solidFill>
+                <a:latin typeface="Courier New"/>
+              </a:rPr>
+              <a:t>xs = rng.standard_normal((T, n_x))</a:t>
+            </a:r>
+          </a:p>
+          <a:p>
+            <a:pPr>
+              <a:defRPr sz="1200" b="0">
+                <a:solidFill>
+                  <a:srgbClr val="F8FAFC"/>
+                </a:solidFill>
+                <a:latin typeface="Courier New"/>
+              </a:defRPr>
+            </a:pPr>
+            <a:r>
+              <a:rPr sz="1200" b="0">
+                <a:solidFill>
+                  <a:srgbClr val="F8FAFC"/>
+                </a:solidFill>
+                <a:latin typeface="Courier New"/>
+              </a:rPr>
+              <a:t> </a:t>
+            </a:r>
+          </a:p>
+          <a:p>
+            <a:pPr>
+              <a:defRPr sz="1200" b="0">
+                <a:solidFill>
+                  <a:srgbClr val="F8FAFC"/>
+                </a:solidFill>
+                <a:latin typeface="Courier New"/>
+              </a:defRPr>
+            </a:pPr>
+            <a:r>
+              <a:rPr sz="1200" b="0">
+                <a:solidFill>
+                  <a:srgbClr val="F8FAFC"/>
+                </a:solidFill>
+                <a:latin typeface="Courier New"/>
+              </a:rPr>
+              <a:t>h = np.zeros(n_h)</a:t>
+            </a:r>
+          </a:p>
+          <a:p>
+            <a:pPr>
+              <a:defRPr sz="1200" b="0">
+                <a:solidFill>
+                  <a:srgbClr val="F8FAFC"/>
+                </a:solidFill>
+                <a:latin typeface="Courier New"/>
+              </a:defRPr>
+            </a:pPr>
+            <a:r>
+              <a:rPr sz="1200" b="0">
+                <a:solidFill>
+                  <a:srgbClr val="F8FAFC"/>
+                </a:solidFill>
+                <a:latin typeface="Courier New"/>
+              </a:rPr>
+              <a:t>H = []</a:t>
+            </a:r>
+          </a:p>
+          <a:p>
+            <a:pPr>
+              <a:defRPr sz="1200" b="0">
+                <a:solidFill>
+                  <a:srgbClr val="F8FAFC"/>
+                </a:solidFill>
+                <a:latin typeface="Courier New"/>
+              </a:defRPr>
+            </a:pPr>
+            <a:r>
+              <a:rPr sz="1200" b="0">
+                <a:solidFill>
+                  <a:srgbClr val="F8FAFC"/>
+                </a:solidFill>
+                <a:latin typeface="Courier New"/>
+              </a:rPr>
+              <a:t>for t in range(T):</a:t>
+            </a:r>
+          </a:p>
+          <a:p>
+            <a:pPr>
+              <a:defRPr sz="1200" b="0">
+                <a:solidFill>
+                  <a:srgbClr val="F8FAFC"/>
+                </a:solidFill>
+                <a:latin typeface="Courier New"/>
+              </a:defRPr>
+            </a:pPr>
+            <a:r>
+              <a:rPr sz="1200" b="0">
+                <a:solidFill>
+                  <a:srgbClr val="F8FAFC"/>
+                </a:solidFill>
+                <a:latin typeface="Courier New"/>
+              </a:rPr>
+              <a:t>    h = np.tanh(Wx @ xs[t] + Wh @ h + b)   # el estado se realimenta</a:t>
+            </a:r>
+          </a:p>
+          <a:p>
+            <a:pPr>
+              <a:defRPr sz="1200" b="0">
+                <a:solidFill>
+                  <a:srgbClr val="F8FAFC"/>
+                </a:solidFill>
+                <a:latin typeface="Courier New"/>
+              </a:defRPr>
+            </a:pPr>
+            <a:r>
+              <a:rPr sz="1200" b="0">
+                <a:solidFill>
+                  <a:srgbClr val="F8FAFC"/>
+                </a:solidFill>
+                <a:latin typeface="Courier New"/>
+              </a:rPr>
+              <a:t>    H.append(h)</a:t>
+            </a:r>
+          </a:p>
+          <a:p>
+            <a:pPr>
+              <a:defRPr sz="1200" b="0">
+                <a:solidFill>
+                  <a:srgbClr val="F8FAFC"/>
+                </a:solidFill>
+                <a:latin typeface="Courier New"/>
+              </a:defRPr>
+            </a:pPr>
+            <a:r>
+              <a:rPr sz="1200" b="0">
+                <a:solidFill>
+                  <a:srgbClr val="F8FAFC"/>
+                </a:solidFill>
+                <a:latin typeface="Courier New"/>
+              </a:rPr>
+              <a:t>H = np.stack(H)</a:t>
+            </a:r>
+          </a:p>
+          <a:p>
+            <a:pPr>
+              <a:defRPr sz="1200" b="0">
+                <a:solidFill>
+                  <a:srgbClr val="F8FAFC"/>
+                </a:solidFill>
+                <a:latin typeface="Courier New"/>
+              </a:defRPr>
+            </a:pPr>
+            <a:r>
+              <a:rPr sz="1200" b="0">
+                <a:solidFill>
+                  <a:srgbClr val="F8FAFC"/>
+                </a:solidFill>
+                <a:latin typeface="Courier New"/>
+              </a:rPr>
+              <a:t>print("estados h_t:", H.shape)             # (T, n_h)</a:t>
+            </a:r>
+          </a:p>
+          <a:p>
+            <a:pPr>
+              <a:defRPr sz="1200" b="0">
+                <a:solidFill>
+                  <a:srgbClr val="F8FAFC"/>
+                </a:solidFill>
+                <a:latin typeface="Courier New"/>
+              </a:defRPr>
+            </a:pPr>
+            <a:r>
+              <a:rPr sz="1200" b="0">
+                <a:solidFill>
+                  <a:srgbClr val="F8FAFC"/>
+                </a:solidFill>
+                <a:latin typeface="Courier New"/>
+              </a:rPr>
+              <a:t># ... (truncado)</a:t>
             </a:r>
           </a:p>
         </p:txBody>

--- a/docs/presentaciones/classes/clase-135-rnns-neuronas-recurrentes-bptt-presentacion.pptx
+++ b/docs/presentaciones/classes/clase-135-rnns-neuronas-recurrentes-bptt-presentacion.pptx
@@ -3272,7 +3272,7 @@
                 </a:solidFill>
                 <a:latin typeface="Segoe UI"/>
               </a:rPr>
-              <a:t>Parte: 2 — Deep Learning · Fuente: Géron, cap. 15 § Recurrent Neurons and Layers.  Duración estimada: 70 min.</a:t>
+              <a:t>Parte: 2 — Deep Learning · Fuente: Géron, cap. 15 § Recurrent Neurons and Layers.  Duración estimada: 70 min. · Nivel: Avanzado</a:t>
             </a:r>
           </a:p>
         </p:txBody>
@@ -3581,7 +3581,7 @@
                 </a:solidFill>
                 <a:latin typeface="Segoe UI"/>
               </a:rPr>
-              <a:t>Parte: 2 — Deep Learning · Fuente: Géron, cap. 15 § Recurrent Neurons and Layers.  Duración estimada: 70 min.</a:t>
+              <a:t>Parte: 2 — Deep Learning · Fuente: Géron, cap. 15 § Recurrent Neurons and Layers.  Duración estimada: 70 min. · Nivel: Avanzado</a:t>
             </a:r>
           </a:p>
         </p:txBody>
